--- a/ASUULT/lab9.pptx
+++ b/ASUULT/lab9.pptx
@@ -130,19 +130,12 @@
       </a:defRPr>
     </a:lvl9pPr>
   </p:defaultTextStyle>
+  <p:extLst>
+    <p:ext uri="{EFAFB233-063F-42B5-8137-9DF3F51BA10A}">
+      <p15:sldGuideLst xmlns:p15="http://schemas.microsoft.com/office/powerpoint/2012/main"/>
+    </p:ext>
+  </p:extLst>
 </p:presentation>
-</file>
-
-<file path=ppt/revisionInfo.xml><?xml version="1.0" encoding="utf-8"?>
-<p1510:revInfo xmlns:a="http://schemas.openxmlformats.org/drawingml/2006/main" xmlns:r="http://schemas.openxmlformats.org/officeDocument/2006/relationships" xmlns:p1510="http://schemas.microsoft.com/office/powerpoint/2015/10/main">
-  <p1510:revLst>
-    <p1510:client id="{07D71D5C-3CD1-852E-8B68-95C70930C3B6}" v="370" dt="2026-04-29T16:09:00.859"/>
-    <p1510:client id="{34195D25-F5CF-C6C1-6D18-48D70F2CD3F4}" v="243" dt="2026-04-29T14:48:38.023"/>
-    <p1510:client id="{495BFF3D-9287-4115-8C23-7157EAECA1D0}" v="1" dt="2026-04-29T23:49:04.503"/>
-    <p1510:client id="{A569DC6E-A853-2FD2-B07C-8375381681F3}" v="3210" dt="2026-04-29T15:43:33.132"/>
-    <p1510:client id="{F8CE84E4-CB01-1230-7C2D-98B7A92673B5}" v="58" dt="2026-04-29T15:02:35.374"/>
-  </p1510:revLst>
-</p1510:revInfo>
 </file>
 
 <file path=ppt/changesInfos/changesInfo1.xml><?xml version="1.0" encoding="utf-8"?>
@@ -150,10 +143,41 @@
   <pc:docChgLst>
     <pc:chgData name="ERDENEBULGAN Otgonbayar" userId="bec125cd-7ef1-4687-9ea2-2720d4118683" providerId="ADAL" clId="{AE7BCB0D-CAB0-4CB1-82D5-4EAD9B91E054}"/>
     <pc:docChg chg="modSld">
-      <pc:chgData name="ERDENEBULGAN Otgonbayar" userId="bec125cd-7ef1-4687-9ea2-2720d4118683" providerId="ADAL" clId="{AE7BCB0D-CAB0-4CB1-82D5-4EAD9B91E054}" dt="2026-04-29T23:49:30.789" v="2" actId="1076"/>
+      <pc:chgData name="ERDENEBULGAN Otgonbayar" userId="bec125cd-7ef1-4687-9ea2-2720d4118683" providerId="ADAL" clId="{AE7BCB0D-CAB0-4CB1-82D5-4EAD9B91E054}" dt="2026-05-03T13:33:44.029" v="58" actId="20577"/>
       <pc:docMkLst>
         <pc:docMk/>
       </pc:docMkLst>
+      <pc:sldChg chg="modSp mod">
+        <pc:chgData name="ERDENEBULGAN Otgonbayar" userId="bec125cd-7ef1-4687-9ea2-2720d4118683" providerId="ADAL" clId="{AE7BCB0D-CAB0-4CB1-82D5-4EAD9B91E054}" dt="2026-05-03T13:33:44.029" v="58" actId="20577"/>
+        <pc:sldMkLst>
+          <pc:docMk/>
+          <pc:sldMk cId="0" sldId="256"/>
+        </pc:sldMkLst>
+        <pc:spChg chg="mod">
+          <ac:chgData name="ERDENEBULGAN Otgonbayar" userId="bec125cd-7ef1-4687-9ea2-2720d4118683" providerId="ADAL" clId="{AE7BCB0D-CAB0-4CB1-82D5-4EAD9B91E054}" dt="2026-05-03T13:33:44.029" v="58" actId="20577"/>
+          <ac:spMkLst>
+            <pc:docMk/>
+            <pc:sldMk cId="0" sldId="256"/>
+            <ac:spMk id="5" creationId="{00000000-0000-0000-0000-000000000000}"/>
+          </ac:spMkLst>
+        </pc:spChg>
+        <pc:spChg chg="mod">
+          <ac:chgData name="ERDENEBULGAN Otgonbayar" userId="bec125cd-7ef1-4687-9ea2-2720d4118683" providerId="ADAL" clId="{AE7BCB0D-CAB0-4CB1-82D5-4EAD9B91E054}" dt="2026-05-03T13:33:15.228" v="11" actId="20577"/>
+          <ac:spMkLst>
+            <pc:docMk/>
+            <pc:sldMk cId="0" sldId="256"/>
+            <ac:spMk id="9" creationId="{00000000-0000-0000-0000-000000000000}"/>
+          </ac:spMkLst>
+        </pc:spChg>
+        <pc:spChg chg="mod">
+          <ac:chgData name="ERDENEBULGAN Otgonbayar" userId="bec125cd-7ef1-4687-9ea2-2720d4118683" providerId="ADAL" clId="{AE7BCB0D-CAB0-4CB1-82D5-4EAD9B91E054}" dt="2026-05-03T13:33:37.864" v="54" actId="20577"/>
+          <ac:spMkLst>
+            <pc:docMk/>
+            <pc:sldMk cId="0" sldId="256"/>
+            <ac:spMk id="10" creationId="{00000000-0000-0000-0000-000000000000}"/>
+          </ac:spMkLst>
+        </pc:spChg>
+      </pc:sldChg>
       <pc:sldChg chg="modSp mod">
         <pc:chgData name="ERDENEBULGAN Otgonbayar" userId="bec125cd-7ef1-4687-9ea2-2720d4118683" providerId="ADAL" clId="{AE7BCB0D-CAB0-4CB1-82D5-4EAD9B91E054}" dt="2026-04-29T23:49:30.789" v="2" actId="1076"/>
         <pc:sldMkLst>
@@ -255,7 +279,7 @@
           </a:lstStyle>
           <a:p>
             <a:fld id="{0405A0DE-5506-44C5-B6E0-9BF11DB207C7}" type="datetimeFigureOut">
-              <a:t>4/30/2026</a:t>
+              <a:t>5/3/2026</a:t>
             </a:fld>
             <a:endParaRPr lang="en-GB"/>
           </a:p>
@@ -3568,38 +3592,30 @@
               <a:buNone/>
             </a:pPr>
             <a:r>
-              <a:rPr lang="en-US" sz="1400" b="1" err="1">
+              <a:rPr lang="en-US" sz="1400" b="1" dirty="0">
                 <a:latin typeface="Calibri"/>
                 <a:ea typeface="Calibri"/>
                 <a:cs typeface="Calibri"/>
               </a:rPr>
-              <a:t>Лабораторийн</a:t>
-            </a:r>
-            <a:r>
-              <a:rPr lang="en-US" sz="1400" b="1">
+              <a:t>Лабораторийн </a:t>
+            </a:r>
+            <a:r>
+              <a:rPr lang="en-US" sz="1400" b="1" dirty="0" err="1">
                 <a:latin typeface="Calibri"/>
                 <a:ea typeface="Calibri"/>
                 <a:cs typeface="Calibri"/>
               </a:rPr>
-              <a:t> </a:t>
-            </a:r>
-            <a:r>
-              <a:rPr lang="en-US" sz="1400" b="1" err="1">
+              <a:t>ажил</a:t>
+            </a:r>
+            <a:r>
+              <a:rPr lang="en-US" sz="1400" b="1" dirty="0">
                 <a:latin typeface="Calibri"/>
                 <a:ea typeface="Calibri"/>
                 <a:cs typeface="Calibri"/>
               </a:rPr>
-              <a:t>ажил</a:t>
-            </a:r>
-            <a:r>
-              <a:rPr lang="en-US" sz="1400" b="1">
-                <a:latin typeface="Calibri"/>
-                <a:ea typeface="Calibri"/>
-                <a:cs typeface="Calibri"/>
-              </a:rPr>
-              <a:t> №8</a:t>
-            </a:r>
-            <a:endParaRPr lang="en-US" sz="1400">
+              <a:t> №9</a:t>
+            </a:r>
+            <a:endParaRPr lang="en-US" sz="1400" dirty="0">
               <a:latin typeface="Calibri"/>
               <a:ea typeface="Calibri"/>
               <a:cs typeface="Calibri"/>
@@ -3768,7 +3784,7 @@
               <a:buNone/>
             </a:pPr>
             <a:r>
-              <a:rPr lang="en-US" sz="1600" err="1">
+              <a:rPr lang="en-US" sz="1600" dirty="0" err="1">
                 <a:latin typeface="Calibri"/>
                 <a:ea typeface="Calibri"/>
                 <a:cs typeface="Calibri"/>
@@ -3776,12 +3792,12 @@
               <a:t>Баг</a:t>
             </a:r>
             <a:r>
-              <a:rPr lang="en-US" sz="1600">
+              <a:rPr lang="en-US" sz="1600" dirty="0">
                 <a:latin typeface="Calibri"/>
                 <a:ea typeface="Calibri"/>
                 <a:cs typeface="Calibri"/>
               </a:rPr>
-              <a:t>: IRIS</a:t>
+              <a:t> : IRIS</a:t>
             </a:r>
           </a:p>
         </p:txBody>
@@ -3808,7 +3824,7 @@
           <a:lstStyle/>
           <a:p>
             <a:r>
-              <a:rPr lang="en-US" sz="1400">
+              <a:rPr lang="en-US" sz="1400" dirty="0">
                 <a:latin typeface="Calibri"/>
                 <a:ea typeface="Calibri"/>
                 <a:cs typeface="Calibri"/>
@@ -3816,7 +3832,7 @@
               <a:t>• </a:t>
             </a:r>
             <a:r>
-              <a:rPr lang="en-US" sz="1400" err="1">
+              <a:rPr lang="en-US" sz="1400" dirty="0" err="1">
                 <a:latin typeface="Calibri"/>
                 <a:ea typeface="Calibri"/>
                 <a:cs typeface="Calibri"/>
@@ -3824,7 +3840,7 @@
               <a:t>О.Эрдэнэбулган</a:t>
             </a:r>
             <a:r>
-              <a:rPr lang="en-US" sz="1400">
+              <a:rPr lang="en-US" sz="1400" dirty="0">
                 <a:latin typeface="Calibri"/>
                 <a:ea typeface="Calibri"/>
                 <a:cs typeface="Calibri"/>
@@ -3832,7 +3848,7 @@
               <a:t> (</a:t>
             </a:r>
             <a:r>
-              <a:rPr lang="en-US" sz="1400" err="1">
+              <a:rPr lang="en-US" sz="1400" dirty="0" err="1">
                 <a:latin typeface="Calibri"/>
                 <a:ea typeface="Calibri"/>
                 <a:cs typeface="Calibri"/>
@@ -3840,7 +3856,7 @@
               <a:t>Багийн</a:t>
             </a:r>
             <a:r>
-              <a:rPr lang="en-US" sz="1400">
+              <a:rPr lang="en-US" sz="1400" dirty="0">
                 <a:latin typeface="Calibri"/>
                 <a:ea typeface="Calibri"/>
                 <a:cs typeface="Calibri"/>
@@ -3848,7 +3864,7 @@
               <a:t> </a:t>
             </a:r>
             <a:r>
-              <a:rPr lang="en-US" sz="1400" err="1">
+              <a:rPr lang="en-US" sz="1400" dirty="0" err="1">
                 <a:latin typeface="Calibri"/>
                 <a:ea typeface="Calibri"/>
                 <a:cs typeface="Calibri"/>
@@ -3856,14 +3872,14 @@
               <a:t>ахлагч</a:t>
             </a:r>
             <a:r>
-              <a:rPr lang="en-US" sz="1400">
+              <a:rPr lang="en-US" sz="1400" dirty="0">
                 <a:latin typeface="Calibri"/>
                 <a:ea typeface="Calibri"/>
                 <a:cs typeface="Calibri"/>
               </a:rPr>
               <a:t>)</a:t>
             </a:r>
-            <a:endParaRPr lang="en-US">
+            <a:endParaRPr lang="en-US" dirty="0">
               <a:ea typeface="Calibri" panose="020F0502020204030204"/>
               <a:cs typeface="Calibri" panose="020F0502020204030204"/>
             </a:endParaRPr>
@@ -3871,7 +3887,7 @@
           <a:p>
             <a:pPr algn="just"/>
             <a:r>
-              <a:rPr lang="en-US" sz="1400">
+              <a:rPr lang="en-US" sz="1400" dirty="0">
                 <a:latin typeface="Calibri"/>
                 <a:ea typeface="Calibri"/>
                 <a:cs typeface="Calibri"/>
@@ -3879,41 +3895,54 @@
               <a:t>• </a:t>
             </a:r>
             <a:r>
-              <a:rPr lang="en-US" sz="1400" err="1">
+              <a:rPr lang="mn-MN" sz="1400" dirty="0">
                 <a:latin typeface="Calibri"/>
                 <a:ea typeface="Calibri"/>
                 <a:cs typeface="Calibri"/>
               </a:rPr>
-              <a:t>Д.Сундуйжав</a:t>
-            </a:r>
-            <a:r>
-              <a:rPr lang="en-US" sz="1400">
+              <a:t>С.Энхболд</a:t>
+            </a:r>
+            <a:endParaRPr lang="en-US" sz="1400" dirty="0">
+              <a:latin typeface="Calibri"/>
+              <a:ea typeface="Calibri"/>
+              <a:cs typeface="Calibri"/>
+            </a:endParaRPr>
+          </a:p>
+          <a:p>
+            <a:pPr algn="just"/>
+            <a:r>
+              <a:rPr lang="en-US" sz="1400" dirty="0">
                 <a:latin typeface="Calibri"/>
                 <a:ea typeface="Calibri"/>
                 <a:cs typeface="Calibri"/>
               </a:rPr>
-              <a:t> </a:t>
-            </a:r>
-          </a:p>
-          <a:p>
-            <a:pPr algn="just"/>
-            <a:r>
-              <a:rPr lang="en-US" sz="1400">
+              <a:t>• </a:t>
+            </a:r>
+            <a:r>
+              <a:rPr lang="mn-MN" sz="1400" dirty="0">
                 <a:latin typeface="Calibri"/>
                 <a:ea typeface="Calibri"/>
                 <a:cs typeface="Calibri"/>
               </a:rPr>
-              <a:t>•  </a:t>
-            </a:r>
-            <a:r>
-              <a:rPr lang="en-US" sz="1400" err="1">
+              <a:t>П</a:t>
+            </a:r>
+            <a:r>
+              <a:rPr lang="en-US" sz="1400" dirty="0">
                 <a:latin typeface="Calibri"/>
                 <a:ea typeface="Calibri"/>
                 <a:cs typeface="Calibri"/>
               </a:rPr>
-              <a:t>Б.Тэмүүлэл</a:t>
-            </a:r>
-            <a:endParaRPr lang="en-US" sz="1400">
+              <a:t>.</a:t>
+            </a:r>
+            <a:r>
+              <a:rPr lang="mn-MN" sz="1400" dirty="0">
+                <a:latin typeface="Calibri"/>
+                <a:ea typeface="Calibri"/>
+                <a:cs typeface="Calibri"/>
+              </a:rPr>
+              <a:t>Энхтүвшин</a:t>
+            </a:r>
+            <a:endParaRPr lang="en-US" sz="1400" dirty="0">
               <a:latin typeface="Calibri"/>
               <a:ea typeface="Calibri"/>
               <a:cs typeface="Calibri"/>

--- a/ASUULT/lab9.pptx
+++ b/ASUULT/lab9.pptx
@@ -142,8 +142,8 @@
 <pc:chgInfo xmlns:a="http://schemas.openxmlformats.org/drawingml/2006/main" xmlns:r="http://schemas.openxmlformats.org/officeDocument/2006/relationships" xmlns:ac="http://schemas.microsoft.com/office/drawing/2013/main/command" xmlns:pc="http://schemas.microsoft.com/office/powerpoint/2013/main/command">
   <pc:docChgLst>
     <pc:chgData name="ERDENEBULGAN Otgonbayar" userId="bec125cd-7ef1-4687-9ea2-2720d4118683" providerId="ADAL" clId="{AE7BCB0D-CAB0-4CB1-82D5-4EAD9B91E054}"/>
-    <pc:docChg chg="modSld">
-      <pc:chgData name="ERDENEBULGAN Otgonbayar" userId="bec125cd-7ef1-4687-9ea2-2720d4118683" providerId="ADAL" clId="{AE7BCB0D-CAB0-4CB1-82D5-4EAD9B91E054}" dt="2026-05-03T13:33:44.029" v="58" actId="20577"/>
+    <pc:docChg chg="undo custSel modSld">
+      <pc:chgData name="ERDENEBULGAN Otgonbayar" userId="bec125cd-7ef1-4687-9ea2-2720d4118683" providerId="ADAL" clId="{AE7BCB0D-CAB0-4CB1-82D5-4EAD9B91E054}" dt="2026-05-05T01:17:31.827" v="477" actId="20577"/>
       <pc:docMkLst>
         <pc:docMk/>
       </pc:docMkLst>
@@ -175,6 +175,77 @@
             <pc:docMk/>
             <pc:sldMk cId="0" sldId="256"/>
             <ac:spMk id="10" creationId="{00000000-0000-0000-0000-000000000000}"/>
+          </ac:spMkLst>
+        </pc:spChg>
+      </pc:sldChg>
+      <pc:sldChg chg="delSp modSp mod">
+        <pc:chgData name="ERDENEBULGAN Otgonbayar" userId="bec125cd-7ef1-4687-9ea2-2720d4118683" providerId="ADAL" clId="{AE7BCB0D-CAB0-4CB1-82D5-4EAD9B91E054}" dt="2026-05-05T01:17:31.827" v="477" actId="20577"/>
+        <pc:sldMkLst>
+          <pc:docMk/>
+          <pc:sldMk cId="0" sldId="258"/>
+        </pc:sldMkLst>
+        <pc:spChg chg="mod">
+          <ac:chgData name="ERDENEBULGAN Otgonbayar" userId="bec125cd-7ef1-4687-9ea2-2720d4118683" providerId="ADAL" clId="{AE7BCB0D-CAB0-4CB1-82D5-4EAD9B91E054}" dt="2026-05-05T01:12:01.044" v="391" actId="20577"/>
+          <ac:spMkLst>
+            <pc:docMk/>
+            <pc:sldMk cId="0" sldId="258"/>
+            <ac:spMk id="6" creationId="{00000000-0000-0000-0000-000000000000}"/>
+          </ac:spMkLst>
+        </pc:spChg>
+        <pc:spChg chg="mod">
+          <ac:chgData name="ERDENEBULGAN Otgonbayar" userId="bec125cd-7ef1-4687-9ea2-2720d4118683" providerId="ADAL" clId="{AE7BCB0D-CAB0-4CB1-82D5-4EAD9B91E054}" dt="2026-05-05T01:17:23.692" v="469" actId="1076"/>
+          <ac:spMkLst>
+            <pc:docMk/>
+            <pc:sldMk cId="0" sldId="258"/>
+            <ac:spMk id="7" creationId="{00000000-0000-0000-0000-000000000000}"/>
+          </ac:spMkLst>
+        </pc:spChg>
+        <pc:spChg chg="mod">
+          <ac:chgData name="ERDENEBULGAN Otgonbayar" userId="bec125cd-7ef1-4687-9ea2-2720d4118683" providerId="ADAL" clId="{AE7BCB0D-CAB0-4CB1-82D5-4EAD9B91E054}" dt="2026-05-05T01:14:11.002" v="424" actId="20577"/>
+          <ac:spMkLst>
+            <pc:docMk/>
+            <pc:sldMk cId="0" sldId="258"/>
+            <ac:spMk id="12" creationId="{00000000-0000-0000-0000-000000000000}"/>
+          </ac:spMkLst>
+        </pc:spChg>
+        <pc:spChg chg="mod">
+          <ac:chgData name="ERDENEBULGAN Otgonbayar" userId="bec125cd-7ef1-4687-9ea2-2720d4118683" providerId="ADAL" clId="{AE7BCB0D-CAB0-4CB1-82D5-4EAD9B91E054}" dt="2026-05-05T01:17:31.827" v="477" actId="20577"/>
+          <ac:spMkLst>
+            <pc:docMk/>
+            <pc:sldMk cId="0" sldId="258"/>
+            <ac:spMk id="14" creationId="{00000000-0000-0000-0000-000000000000}"/>
+          </ac:spMkLst>
+        </pc:spChg>
+        <pc:spChg chg="mod">
+          <ac:chgData name="ERDENEBULGAN Otgonbayar" userId="bec125cd-7ef1-4687-9ea2-2720d4118683" providerId="ADAL" clId="{AE7BCB0D-CAB0-4CB1-82D5-4EAD9B91E054}" dt="2026-05-05T01:09:14.844" v="153" actId="20577"/>
+          <ac:spMkLst>
+            <pc:docMk/>
+            <pc:sldMk cId="0" sldId="258"/>
+            <ac:spMk id="18" creationId="{9FFDDC3A-6BAD-5AB4-2628-017FA368B783}"/>
+          </ac:spMkLst>
+        </pc:spChg>
+        <pc:spChg chg="del mod">
+          <ac:chgData name="ERDENEBULGAN Otgonbayar" userId="bec125cd-7ef1-4687-9ea2-2720d4118683" providerId="ADAL" clId="{AE7BCB0D-CAB0-4CB1-82D5-4EAD9B91E054}" dt="2026-05-05T01:14:28.715" v="426" actId="478"/>
+          <ac:spMkLst>
+            <pc:docMk/>
+            <pc:sldMk cId="0" sldId="258"/>
+            <ac:spMk id="19" creationId="{82FAB2C5-296B-11A8-1164-25B729A985F8}"/>
+          </ac:spMkLst>
+        </pc:spChg>
+        <pc:spChg chg="del mod">
+          <ac:chgData name="ERDENEBULGAN Otgonbayar" userId="bec125cd-7ef1-4687-9ea2-2720d4118683" providerId="ADAL" clId="{AE7BCB0D-CAB0-4CB1-82D5-4EAD9B91E054}" dt="2026-05-05T01:13:48.339" v="396" actId="478"/>
+          <ac:spMkLst>
+            <pc:docMk/>
+            <pc:sldMk cId="0" sldId="258"/>
+            <ac:spMk id="20" creationId="{C7C406C0-457D-BE8E-611C-8B9E50731D43}"/>
+          </ac:spMkLst>
+        </pc:spChg>
+        <pc:spChg chg="del mod">
+          <ac:chgData name="ERDENEBULGAN Otgonbayar" userId="bec125cd-7ef1-4687-9ea2-2720d4118683" providerId="ADAL" clId="{AE7BCB0D-CAB0-4CB1-82D5-4EAD9B91E054}" dt="2026-05-05T01:13:51.875" v="398" actId="478"/>
+          <ac:spMkLst>
+            <pc:docMk/>
+            <pc:sldMk cId="0" sldId="258"/>
+            <ac:spMk id="21" creationId="{D699DFBD-C3ED-AC83-CADA-3FCC18AEA594}"/>
           </ac:spMkLst>
         </pc:spChg>
       </pc:sldChg>
@@ -279,7 +350,7 @@
           </a:lstStyle>
           <a:p>
             <a:fld id="{0405A0DE-5506-44C5-B6E0-9BF11DB207C7}" type="datetimeFigureOut">
-              <a:t>5/3/2026</a:t>
+              <a:t>5/5/2026</a:t>
             </a:fld>
             <a:endParaRPr lang="en-GB"/>
           </a:p>
@@ -25185,12 +25256,68 @@
                 <a:ea typeface="Calibri"/>
                 <a:cs typeface="Times New Roman"/>
               </a:rPr>
-              <a:t>• Static гишүүн өгөгдөл судлах
-• Хийсвэр класс, функц ашиглах
-• This хувьсагч эзэмших
-• Полиморфизм хэрэгжүүлэх</a:t>
-            </a:r>
-            <a:endParaRPr lang="en-US" err="1">
+              <a:t>• Header </a:t>
+            </a:r>
+            <a:r>
+              <a:rPr lang="mn-MN" sz="1400" noProof="1">
+                <a:latin typeface="Times New Roman"/>
+                <a:ea typeface="Calibri"/>
+                <a:cs typeface="Times New Roman"/>
+              </a:rPr>
+              <a:t>файлыг судлах </a:t>
+            </a:r>
+            <a:r>
+              <a:rPr lang="en-US" sz="1400" noProof="1">
+                <a:latin typeface="Times New Roman"/>
+                <a:ea typeface="Calibri"/>
+                <a:cs typeface="Times New Roman"/>
+              </a:rPr>
+              <a:t>
+• </a:t>
+            </a:r>
+            <a:r>
+              <a:rPr lang="mn-MN" sz="1400" noProof="1">
+                <a:latin typeface="Times New Roman"/>
+                <a:ea typeface="Calibri"/>
+                <a:cs typeface="Times New Roman"/>
+              </a:rPr>
+              <a:t>Толгой файлуудыг нэгтгэх</a:t>
+            </a:r>
+            <a:r>
+              <a:rPr lang="en-US" sz="1400" noProof="1">
+                <a:latin typeface="Times New Roman"/>
+                <a:ea typeface="Calibri"/>
+                <a:cs typeface="Times New Roman"/>
+              </a:rPr>
+              <a:t>
+• </a:t>
+            </a:r>
+            <a:r>
+              <a:rPr lang="mn-MN" sz="1400" noProof="1">
+                <a:latin typeface="Times New Roman"/>
+                <a:ea typeface="Calibri"/>
+                <a:cs typeface="Times New Roman"/>
+              </a:rPr>
+              <a:t>Файлуудын холбоог тогтоох</a:t>
+            </a:r>
+            <a:r>
+              <a:rPr lang="en-US" sz="1400" noProof="1">
+                <a:latin typeface="Times New Roman"/>
+                <a:ea typeface="Calibri"/>
+                <a:cs typeface="Times New Roman"/>
+              </a:rPr>
+              <a:t>
+• </a:t>
+            </a:r>
+            <a:r>
+              <a:rPr lang="mn-MN" sz="1400" noProof="1">
+                <a:latin typeface="Times New Roman"/>
+                <a:ea typeface="Calibri"/>
+                <a:cs typeface="Times New Roman"/>
+              </a:rPr>
+              <a:t>Удамшлын харьцааг судлах</a:t>
+            </a:r>
+            <a:endParaRPr lang="en-US" dirty="0">
               <a:latin typeface="Times New Roman"/>
               <a:ea typeface="Calibri"/>
               <a:cs typeface="Times New Roman"/>
@@ -25206,7 +25333,7 @@
         </p:nvSpPr>
         <p:spPr>
           <a:xfrm>
-            <a:off x="4637063" y="1879061"/>
+            <a:off x="4653299" y="1867613"/>
             <a:ext cx="4023360" cy="1737360"/>
           </a:xfrm>
           <a:prstGeom prst="rect">
@@ -25228,7 +25355,7 @@
           <a:bodyPr/>
           <a:lstStyle/>
           <a:p>
-            <a:endParaRPr lang="en-US"/>
+            <a:endParaRPr lang="en-US" dirty="0"/>
           </a:p>
         </p:txBody>
       </p:sp>
@@ -25310,7 +25437,7 @@
           <a:lstStyle/>
           <a:p>
             <a:r>
-              <a:rPr lang="en-US" sz="1400" err="1">
+              <a:rPr lang="en-US" sz="1400" dirty="0" err="1">
                 <a:latin typeface="Times New Roman"/>
                 <a:ea typeface="Calibri"/>
                 <a:cs typeface="Times New Roman"/>
@@ -25318,7 +25445,7 @@
               <a:t>О.Эрдэнэбулган</a:t>
             </a:r>
             <a:r>
-              <a:rPr lang="en-US" sz="1400">
+              <a:rPr lang="en-US" sz="1400" dirty="0">
                 <a:latin typeface="Times New Roman"/>
                 <a:ea typeface="Calibri"/>
                 <a:cs typeface="Times New Roman"/>
@@ -25326,7 +25453,7 @@
               <a:t> 24B1NUM1959 (</a:t>
             </a:r>
             <a:r>
-              <a:rPr lang="en-US" sz="1400" err="1">
+              <a:rPr lang="en-US" sz="1400" dirty="0" err="1">
                 <a:latin typeface="Times New Roman"/>
                 <a:ea typeface="Calibri"/>
                 <a:cs typeface="Times New Roman"/>
@@ -25334,7 +25461,7 @@
               <a:t>Ахлагч</a:t>
             </a:r>
             <a:r>
-              <a:rPr lang="en-US" sz="1400">
+              <a:rPr lang="en-US" sz="1400" dirty="0">
                 <a:latin typeface="Times New Roman"/>
                 <a:ea typeface="Calibri"/>
                 <a:cs typeface="Times New Roman"/>
@@ -25366,15 +25493,15 @@
           <a:lstStyle/>
           <a:p>
             <a:r>
-              <a:rPr lang="en-US" sz="1400" err="1">
-                <a:latin typeface="Times New Roman"/>
-                <a:ea typeface="Calibri"/>
-                <a:cs typeface="Times New Roman"/>
-              </a:rPr>
-              <a:t>Д.Сундуйжав</a:t>
-            </a:r>
-            <a:r>
-              <a:rPr lang="en-US" sz="1400">
+              <a:rPr lang="mn-MN" sz="1400" dirty="0">
+                <a:latin typeface="Times New Roman"/>
+                <a:ea typeface="Calibri"/>
+                <a:cs typeface="Times New Roman"/>
+              </a:rPr>
+              <a:t>С.Энхболд</a:t>
+            </a:r>
+            <a:r>
+              <a:rPr lang="en-US" sz="1400" dirty="0">
                 <a:latin typeface="Times New Roman"/>
                 <a:ea typeface="Calibri"/>
                 <a:cs typeface="Times New Roman"/>
@@ -25406,20 +25533,52 @@
           <a:lstStyle/>
           <a:p>
             <a:r>
-              <a:rPr lang="en-US" sz="1400" err="1">
-                <a:latin typeface="Calibri"/>
-                <a:ea typeface="Calibri"/>
-                <a:cs typeface="Calibri"/>
-              </a:rPr>
-              <a:t>Б.Тэмүүлэл</a:t>
-            </a:r>
-            <a:r>
-              <a:rPr lang="en-US" sz="1400">
-                <a:latin typeface="Calibri"/>
-                <a:ea typeface="Calibri"/>
-                <a:cs typeface="Calibri"/>
-              </a:rPr>
-              <a:t> 23B1NUM0135</a:t>
+              <a:rPr lang="mn-MN" sz="1400" dirty="0">
+                <a:latin typeface="Times New Roman" panose="02020603050405020304" pitchFamily="18" charset="0"/>
+                <a:ea typeface="Calibri"/>
+                <a:cs typeface="Times New Roman" panose="02020603050405020304" pitchFamily="18" charset="0"/>
+              </a:rPr>
+              <a:t>П</a:t>
+            </a:r>
+            <a:r>
+              <a:rPr lang="en-US" sz="1400" dirty="0">
+                <a:latin typeface="Times New Roman" panose="02020603050405020304" pitchFamily="18" charset="0"/>
+                <a:ea typeface="Calibri"/>
+                <a:cs typeface="Times New Roman" panose="02020603050405020304" pitchFamily="18" charset="0"/>
+              </a:rPr>
+              <a:t>.</a:t>
+            </a:r>
+            <a:r>
+              <a:rPr lang="mn-MN" sz="1400" dirty="0">
+                <a:latin typeface="Times New Roman" panose="02020603050405020304" pitchFamily="18" charset="0"/>
+                <a:ea typeface="Calibri"/>
+                <a:cs typeface="Times New Roman" panose="02020603050405020304" pitchFamily="18" charset="0"/>
+              </a:rPr>
+              <a:t>Энхтүвшин</a:t>
+            </a:r>
+            <a:r>
+              <a:rPr lang="en-US" sz="1400" dirty="0">
+                <a:latin typeface="Times New Roman" panose="02020603050405020304" pitchFamily="18" charset="0"/>
+                <a:ea typeface="Calibri"/>
+                <a:cs typeface="Times New Roman" panose="02020603050405020304" pitchFamily="18" charset="0"/>
+              </a:rPr>
+              <a:t> 2</a:t>
+            </a:r>
+            <a:r>
+              <a:rPr lang="mn-MN" sz="1400" dirty="0">
+                <a:latin typeface="Times New Roman" panose="02020603050405020304" pitchFamily="18" charset="0"/>
+                <a:ea typeface="Calibri"/>
+                <a:cs typeface="Times New Roman" panose="02020603050405020304" pitchFamily="18" charset="0"/>
+              </a:rPr>
+              <a:t>4</a:t>
+            </a:r>
+            <a:r>
+              <a:rPr lang="en-US" sz="1400" dirty="0">
+                <a:latin typeface="Times New Roman" panose="02020603050405020304" pitchFamily="18" charset="0"/>
+                <a:ea typeface="Calibri"/>
+                <a:cs typeface="Times New Roman" panose="02020603050405020304" pitchFamily="18" charset="0"/>
+              </a:rPr>
+              <a:t>B1NUM1434</a:t>
             </a:r>
           </a:p>
         </p:txBody>
@@ -25786,49 +25945,42 @@
           <a:lstStyle/>
           <a:p>
             <a:r>
-              <a:rPr lang="en-US" err="1">
-                <a:latin typeface="Times New Roman"/>
-                <a:cs typeface="Times New Roman"/>
-              </a:rPr>
-              <a:t>Энэхүү</a:t>
-            </a:r>
-            <a:r>
-              <a:rPr lang="en-US">
-                <a:latin typeface="Times New Roman"/>
-                <a:cs typeface="Times New Roman"/>
-              </a:rPr>
-              <a:t> </a:t>
-            </a:r>
-            <a:r>
-              <a:rPr lang="en-US" err="1">
+              <a:rPr lang="en-US" dirty="0">
+                <a:latin typeface="Times New Roman"/>
+                <a:cs typeface="Times New Roman"/>
+              </a:rPr>
+              <a:t>Энэхүү </a:t>
+            </a:r>
+            <a:r>
+              <a:rPr lang="en-US" dirty="0" err="1">
                 <a:latin typeface="Times New Roman"/>
                 <a:cs typeface="Times New Roman"/>
               </a:rPr>
               <a:t>тайлан</a:t>
             </a:r>
             <a:r>
-              <a:rPr lang="en-US">
-                <a:latin typeface="Times New Roman"/>
-                <a:cs typeface="Times New Roman"/>
-              </a:rPr>
-              <a:t> </a:t>
-            </a:r>
-            <a:r>
-              <a:rPr lang="en-US" err="1">
+              <a:rPr lang="en-US" dirty="0">
+                <a:latin typeface="Times New Roman"/>
+                <a:cs typeface="Times New Roman"/>
+              </a:rPr>
+              <a:t> </a:t>
+            </a:r>
+            <a:r>
+              <a:rPr lang="en-US" dirty="0" err="1">
                 <a:latin typeface="Times New Roman"/>
                 <a:cs typeface="Times New Roman"/>
               </a:rPr>
               <a:t>нь</a:t>
             </a:r>
             <a:r>
-              <a:rPr lang="en-US">
-                <a:latin typeface="Times New Roman"/>
-                <a:cs typeface="Times New Roman"/>
-              </a:rPr>
-              <a:t> </a:t>
-            </a:r>
-            <a:r>
-              <a:rPr lang="en-US">
+              <a:rPr lang="en-US" dirty="0">
+                <a:latin typeface="Times New Roman"/>
+                <a:cs typeface="Times New Roman"/>
+              </a:rPr>
+              <a:t> </a:t>
+            </a:r>
+            <a:r>
+              <a:rPr lang="en-US" dirty="0">
                 <a:latin typeface="Times New Roman"/>
                 <a:ea typeface="+mn-lt"/>
                 <a:cs typeface="Times New Roman"/>
@@ -25836,7 +25988,7 @@
               <a:t>С++ </a:t>
             </a:r>
             <a:r>
-              <a:rPr lang="en-US" err="1">
+              <a:rPr lang="en-US" dirty="0" err="1">
                 <a:latin typeface="Times New Roman"/>
                 <a:ea typeface="+mn-lt"/>
                 <a:cs typeface="Times New Roman"/>
@@ -25844,7 +25996,7 @@
               <a:t>програмчлалд</a:t>
             </a:r>
             <a:r>
-              <a:rPr lang="en-US">
+              <a:rPr lang="en-US" dirty="0">
                 <a:latin typeface="Times New Roman"/>
                 <a:ea typeface="+mn-lt"/>
                 <a:cs typeface="Times New Roman"/>
@@ -25852,15 +26004,15 @@
               <a:t> </a:t>
             </a:r>
             <a:r>
-              <a:rPr lang="en-US" err="1">
+              <a:rPr lang="mn-MN" dirty="0">
                 <a:latin typeface="Times New Roman"/>
                 <a:ea typeface="+mn-lt"/>
                 <a:cs typeface="Times New Roman"/>
               </a:rPr>
-              <a:t>хийсвэр</a:t>
-            </a:r>
-            <a:r>
-              <a:rPr lang="en-US">
+              <a:t>томоохон программыг толгой файл ашиглан</a:t>
+            </a:r>
+            <a:r>
+              <a:rPr lang="en-US" dirty="0">
                 <a:latin typeface="Times New Roman"/>
                 <a:ea typeface="+mn-lt"/>
                 <a:cs typeface="Times New Roman"/>
@@ -25868,31 +26020,31 @@
               <a:t> </a:t>
             </a:r>
             <a:r>
-              <a:rPr lang="en-US" err="1">
+              <a:rPr lang="en-US" dirty="0" err="1">
                 <a:latin typeface="Times New Roman"/>
                 <a:ea typeface="+mn-lt"/>
                 <a:cs typeface="Times New Roman"/>
               </a:rPr>
-              <a:t>класс</a:t>
-            </a:r>
-            <a:r>
-              <a:rPr lang="en-US">
+              <a:t>загварчлах</a:t>
+            </a:r>
+            <a:r>
+              <a:rPr lang="en-US" dirty="0">
                 <a:latin typeface="Times New Roman"/>
                 <a:ea typeface="+mn-lt"/>
                 <a:cs typeface="Times New Roman"/>
               </a:rPr>
-              <a:t>, </a:t>
-            </a:r>
-            <a:r>
-              <a:rPr lang="en-US" err="1">
+              <a:t> </a:t>
+            </a:r>
+            <a:r>
+              <a:rPr lang="en-US" dirty="0" err="1">
                 <a:latin typeface="Times New Roman"/>
                 <a:ea typeface="+mn-lt"/>
                 <a:cs typeface="Times New Roman"/>
               </a:rPr>
-              <a:t>статик</a:t>
-            </a:r>
-            <a:r>
-              <a:rPr lang="en-US">
+              <a:t>аргачлалыг</a:t>
+            </a:r>
+            <a:r>
+              <a:rPr lang="en-US" dirty="0">
                 <a:latin typeface="Times New Roman"/>
                 <a:ea typeface="+mn-lt"/>
                 <a:cs typeface="Times New Roman"/>
@@ -25900,293 +26052,37 @@
               <a:t> </a:t>
             </a:r>
             <a:r>
-              <a:rPr lang="en-US" err="1">
+              <a:rPr lang="en-US" dirty="0" err="1">
                 <a:latin typeface="Times New Roman"/>
                 <a:ea typeface="+mn-lt"/>
                 <a:cs typeface="Times New Roman"/>
               </a:rPr>
-              <a:t>гишүүн</a:t>
-            </a:r>
-            <a:r>
-              <a:rPr lang="en-US">
+              <a:t>судалсан</a:t>
+            </a:r>
+            <a:r>
+              <a:rPr lang="en-US" dirty="0">
                 <a:latin typeface="Times New Roman"/>
                 <a:ea typeface="+mn-lt"/>
                 <a:cs typeface="Times New Roman"/>
               </a:rPr>
-              <a:t>, </a:t>
-            </a:r>
-            <a:r>
-              <a:rPr lang="en-US" err="1">
+              <a:t> </a:t>
+            </a:r>
+            <a:r>
+              <a:rPr lang="en-US" dirty="0" err="1">
                 <a:latin typeface="Times New Roman"/>
                 <a:ea typeface="+mn-lt"/>
                 <a:cs typeface="Times New Roman"/>
               </a:rPr>
-              <a:t>функц</a:t>
-            </a:r>
-            <a:r>
-              <a:rPr lang="en-US">
-                <a:latin typeface="Times New Roman"/>
-                <a:ea typeface="+mn-lt"/>
-                <a:cs typeface="Times New Roman"/>
-              </a:rPr>
-              <a:t> </a:t>
-            </a:r>
-            <a:r>
-              <a:rPr lang="en-US" err="1">
-                <a:latin typeface="Times New Roman"/>
-                <a:ea typeface="+mn-lt"/>
-                <a:cs typeface="Times New Roman"/>
-              </a:rPr>
-              <a:t>ашиглан</a:t>
-            </a:r>
-            <a:r>
-              <a:rPr lang="en-US">
-                <a:latin typeface="Times New Roman"/>
-                <a:ea typeface="+mn-lt"/>
-                <a:cs typeface="Times New Roman"/>
-              </a:rPr>
-              <a:t> </a:t>
-            </a:r>
-            <a:r>
-              <a:rPr lang="en-US" err="1">
-                <a:latin typeface="Times New Roman"/>
-                <a:ea typeface="+mn-lt"/>
-                <a:cs typeface="Times New Roman"/>
-              </a:rPr>
-              <a:t>объект</a:t>
-            </a:r>
-            <a:r>
-              <a:rPr lang="en-US">
-                <a:latin typeface="Times New Roman"/>
-                <a:ea typeface="+mn-lt"/>
-                <a:cs typeface="Times New Roman"/>
-              </a:rPr>
-              <a:t> </a:t>
-            </a:r>
-            <a:r>
-              <a:rPr lang="en-US" err="1">
-                <a:latin typeface="Times New Roman"/>
-                <a:ea typeface="+mn-lt"/>
-                <a:cs typeface="Times New Roman"/>
-              </a:rPr>
-              <a:t>загварчлах</a:t>
-            </a:r>
-            <a:r>
-              <a:rPr lang="en-US">
-                <a:latin typeface="Times New Roman"/>
-                <a:ea typeface="+mn-lt"/>
-                <a:cs typeface="Times New Roman"/>
-              </a:rPr>
-              <a:t> </a:t>
-            </a:r>
-            <a:r>
-              <a:rPr lang="en-US" err="1">
-                <a:latin typeface="Times New Roman"/>
-                <a:ea typeface="+mn-lt"/>
-                <a:cs typeface="Times New Roman"/>
-              </a:rPr>
-              <a:t>аргачлалыг</a:t>
-            </a:r>
-            <a:r>
-              <a:rPr lang="en-US">
-                <a:latin typeface="Times New Roman"/>
-                <a:ea typeface="+mn-lt"/>
-                <a:cs typeface="Times New Roman"/>
-              </a:rPr>
-              <a:t> </a:t>
-            </a:r>
-            <a:r>
-              <a:rPr lang="en-US" err="1">
-                <a:latin typeface="Times New Roman"/>
-                <a:ea typeface="+mn-lt"/>
-                <a:cs typeface="Times New Roman"/>
-              </a:rPr>
-              <a:t>судалсан</a:t>
-            </a:r>
-            <a:r>
-              <a:rPr lang="en-US">
-                <a:latin typeface="Times New Roman"/>
-                <a:ea typeface="+mn-lt"/>
-                <a:cs typeface="Times New Roman"/>
-              </a:rPr>
-              <a:t> </a:t>
-            </a:r>
-            <a:r>
-              <a:rPr lang="en-US" err="1">
-                <a:latin typeface="Times New Roman"/>
-                <a:ea typeface="+mn-lt"/>
-                <a:cs typeface="Times New Roman"/>
-              </a:rPr>
               <a:t>тайлан</a:t>
             </a:r>
-            <a:endParaRPr lang="en-US" err="1">
+            <a:endParaRPr lang="en-US" dirty="0">
               <a:latin typeface="Times New Roman"/>
               <a:cs typeface="Times New Roman"/>
             </a:endParaRPr>
           </a:p>
           <a:p>
             <a:pPr algn="ctr"/>
-            <a:endParaRPr lang="en-GB"/>
-          </a:p>
-        </p:txBody>
-      </p:sp>
-      <p:sp>
-        <p:nvSpPr>
-          <p:cNvPr id="19" name="TextBox 18">
-            <a:extLst>
-              <a:ext uri="{FF2B5EF4-FFF2-40B4-BE49-F238E27FC236}">
-                <a16:creationId xmlns:a16="http://schemas.microsoft.com/office/drawing/2014/main" id="{82FAB2C5-296B-11A8-1164-25B729A985F8}"/>
-              </a:ext>
-            </a:extLst>
-          </p:cNvPr>
-          <p:cNvSpPr txBox="1"/>
-          <p:nvPr/>
-        </p:nvSpPr>
-        <p:spPr>
-          <a:xfrm>
-            <a:off x="4835769" y="3125665"/>
-            <a:ext cx="4572000" cy="584775"/>
-          </a:xfrm>
-          <a:prstGeom prst="rect">
-            <a:avLst/>
-          </a:prstGeom>
-          <a:noFill/>
-        </p:spPr>
-        <p:txBody>
-          <a:bodyPr rot="0" spcFirstLastPara="0" vertOverflow="overflow" horzOverflow="overflow" vert="horz" wrap="square" lIns="91440" tIns="45720" rIns="91440" bIns="45720" numCol="1" spcCol="0" rtlCol="0" fromWordArt="0" anchor="t" anchorCtr="0" forceAA="0" compatLnSpc="1">
-            <a:prstTxWarp prst="textNoShape">
-              <a:avLst/>
-            </a:prstTxWarp>
-            <a:spAutoFit/>
-          </a:bodyPr>
-          <a:lstStyle/>
-          <a:p>
-            <a:r>
-              <a:rPr lang="en-US" sz="1400" b="0" i="0" u="none" strike="noStrike" baseline="0">
-                <a:solidFill>
-                  <a:srgbClr val="000000"/>
-                </a:solidFill>
-                <a:latin typeface="Times New Roman"/>
-                <a:cs typeface="Times New Roman"/>
-              </a:rPr>
-              <a:t>•</a:t>
-            </a:r>
-            <a:endParaRPr lang="en-US">
-              <a:latin typeface="Times New Roman"/>
-              <a:cs typeface="Times New Roman"/>
-            </a:endParaRPr>
-          </a:p>
-          <a:p>
-            <a:pPr algn="ctr"/>
-            <a:endParaRPr lang="en-US"/>
-          </a:p>
-        </p:txBody>
-      </p:sp>
-      <p:sp>
-        <p:nvSpPr>
-          <p:cNvPr id="20" name="TextBox 19">
-            <a:extLst>
-              <a:ext uri="{FF2B5EF4-FFF2-40B4-BE49-F238E27FC236}">
-                <a16:creationId xmlns:a16="http://schemas.microsoft.com/office/drawing/2014/main" id="{C7C406C0-457D-BE8E-611C-8B9E50731D43}"/>
-              </a:ext>
-            </a:extLst>
-          </p:cNvPr>
-          <p:cNvSpPr txBox="1"/>
-          <p:nvPr/>
-        </p:nvSpPr>
-        <p:spPr>
-          <a:xfrm>
-            <a:off x="4835768" y="2756387"/>
-            <a:ext cx="3569679" cy="584775"/>
-          </a:xfrm>
-          <a:prstGeom prst="rect">
-            <a:avLst/>
-          </a:prstGeom>
-          <a:noFill/>
-        </p:spPr>
-        <p:txBody>
-          <a:bodyPr rot="0" spcFirstLastPara="0" vertOverflow="overflow" horzOverflow="overflow" vert="horz" wrap="square" lIns="91440" tIns="45720" rIns="91440" bIns="45720" numCol="1" spcCol="0" rtlCol="0" fromWordArt="0" anchor="t" anchorCtr="0" forceAA="0" compatLnSpc="1">
-            <a:prstTxWarp prst="textNoShape">
-              <a:avLst/>
-            </a:prstTxWarp>
-            <a:spAutoFit/>
-          </a:bodyPr>
-          <a:lstStyle/>
-          <a:p>
-            <a:r>
-              <a:rPr lang="en-US" sz="1400" b="0" i="0" u="none" strike="noStrike" baseline="0">
-                <a:solidFill>
-                  <a:srgbClr val="000000"/>
-                </a:solidFill>
-                <a:latin typeface="Times New Roman"/>
-                <a:cs typeface="Times New Roman"/>
-              </a:rPr>
-              <a:t>•</a:t>
-            </a:r>
-            <a:endParaRPr lang="en-US">
-              <a:latin typeface="Times New Roman"/>
-              <a:cs typeface="Times New Roman"/>
-            </a:endParaRPr>
-          </a:p>
-          <a:p>
-            <a:pPr algn="ctr"/>
-            <a:endParaRPr lang="en-US"/>
-          </a:p>
-        </p:txBody>
-      </p:sp>
-      <p:sp>
-        <p:nvSpPr>
-          <p:cNvPr id="21" name="TextBox 20">
-            <a:extLst>
-              <a:ext uri="{FF2B5EF4-FFF2-40B4-BE49-F238E27FC236}">
-                <a16:creationId xmlns:a16="http://schemas.microsoft.com/office/drawing/2014/main" id="{D699DFBD-C3ED-AC83-CADA-3FCC18AEA594}"/>
-              </a:ext>
-            </a:extLst>
-          </p:cNvPr>
-          <p:cNvSpPr txBox="1"/>
-          <p:nvPr/>
-        </p:nvSpPr>
-        <p:spPr>
-          <a:xfrm>
-            <a:off x="4774223" y="2281604"/>
-            <a:ext cx="4572000" cy="584775"/>
-          </a:xfrm>
-          <a:prstGeom prst="rect">
-            <a:avLst/>
-          </a:prstGeom>
-          <a:noFill/>
-        </p:spPr>
-        <p:txBody>
-          <a:bodyPr rot="0" spcFirstLastPara="0" vertOverflow="overflow" horzOverflow="overflow" vert="horz" wrap="square" lIns="91440" tIns="45720" rIns="91440" bIns="45720" numCol="1" spcCol="0" rtlCol="0" fromWordArt="0" anchor="t" anchorCtr="0" forceAA="0" compatLnSpc="1">
-            <a:prstTxWarp prst="textNoShape">
-              <a:avLst/>
-            </a:prstTxWarp>
-            <a:spAutoFit/>
-          </a:bodyPr>
-          <a:lstStyle/>
-          <a:p>
-            <a:r>
-              <a:rPr lang="en-US" sz="1400" b="0" i="0" u="none" strike="noStrike" baseline="0">
-                <a:solidFill>
-                  <a:srgbClr val="000000"/>
-                </a:solidFill>
-                <a:latin typeface="Times New Roman"/>
-                <a:cs typeface="Times New Roman"/>
-              </a:rPr>
-              <a:t>•</a:t>
-            </a:r>
-            <a:endParaRPr lang="en-US">
-              <a:latin typeface="Times New Roman"/>
-              <a:cs typeface="Times New Roman"/>
-            </a:endParaRPr>
-          </a:p>
-          <a:p>
-            <a:pPr algn="ctr"/>
-            <a:endParaRPr lang="en-US">
-              <a:latin typeface="Times New Roman"/>
-              <a:ea typeface="+mn-lt"/>
-              <a:cs typeface="Times New Roman"/>
-            </a:endParaRPr>
+            <a:endParaRPr lang="en-GB" dirty="0"/>
           </a:p>
         </p:txBody>
       </p:sp>
